--- a/assets/powerpoints/module-n1-orientation/C2-la-barre-rouge.pptx
+++ b/assets/powerpoints/module-n1-orientation/C2-la-barre-rouge.pptx
@@ -4804,7 +4804,25 @@
                 </a:solidFill>
                 <a:latin typeface="Verdana"/>
               </a:rPr>
-              <a:t>Au Québec, il est interdit de fumer dans tous les bâtiments publics, et à moins de &lt;b&gt;neuf mètres&lt;/b&gt; d'une porte. C'est la loi, pas une règle du centre.</a:t>
+              <a:t>Au Québec, il est interdit de fumer dans tous les bâtiments publics, et à moins de </a:t>
+            </a:r>
+            <a:r>
+              <a:rPr sz="2000" b="1" i="0">
+                <a:solidFill>
+                  <a:srgbClr val="4B4F52"/>
+                </a:solidFill>
+                <a:latin typeface="Verdana"/>
+              </a:rPr>
+              <a:t>neuf mètres</a:t>
+            </a:r>
+            <a:r>
+              <a:rPr sz="2000" b="0" i="0">
+                <a:solidFill>
+                  <a:srgbClr val="4B4F52"/>
+                </a:solidFill>
+                <a:latin typeface="Verdana"/>
+              </a:rPr>
+              <a:t> d'une porte. C'est la loi, pas une règle du centre.</a:t>
             </a:r>
           </a:p>
         </p:txBody>
@@ -7226,7 +7244,43 @@
                 </a:solidFill>
                 <a:latin typeface="Verdana"/>
               </a:rPr>
-              <a:t>Un dessin &lt;b&gt;seul&lt;/b&gt; montre ce qu'on peut faire. Un dessin &lt;b&gt;barré de rouge&lt;/b&gt; montre ce qu'on ne fait pas. Ce signe se comprend partout dans le monde, sans un seul mot.</a:t>
+              <a:t>Un dessin </a:t>
+            </a:r>
+            <a:r>
+              <a:rPr sz="2000" b="1" i="0">
+                <a:solidFill>
+                  <a:srgbClr val="4B4F52"/>
+                </a:solidFill>
+                <a:latin typeface="Verdana"/>
+              </a:rPr>
+              <a:t>seul</a:t>
+            </a:r>
+            <a:r>
+              <a:rPr sz="2000" b="0" i="0">
+                <a:solidFill>
+                  <a:srgbClr val="4B4F52"/>
+                </a:solidFill>
+                <a:latin typeface="Verdana"/>
+              </a:rPr>
+              <a:t> montre ce qu'on peut faire. Un dessin </a:t>
+            </a:r>
+            <a:r>
+              <a:rPr sz="2000" b="1" i="0">
+                <a:solidFill>
+                  <a:srgbClr val="4B4F52"/>
+                </a:solidFill>
+                <a:latin typeface="Verdana"/>
+              </a:rPr>
+              <a:t>barré de rouge</a:t>
+            </a:r>
+            <a:r>
+              <a:rPr sz="2000" b="0" i="0">
+                <a:solidFill>
+                  <a:srgbClr val="4B4F52"/>
+                </a:solidFill>
+                <a:latin typeface="Verdana"/>
+              </a:rPr>
+              <a:t> montre ce qu'on ne fait pas. Ce signe se comprend partout dans le monde, sans un seul mot.</a:t>
             </a:r>
           </a:p>
         </p:txBody>
